--- a/kpi-dashboard/docs/CS_Pulse_VP_CS_Tutorial.pptx
+++ b/kpi-dashboard/docs/CS_Pulse_VP_CS_Tutorial.pptx
@@ -2116,7 +2116,7 @@
                 <a:ea typeface="Georgia" pitchFamily="34" charset="-122"/>
                 <a:cs typeface="Georgia" pitchFamily="34" charset="-120"/>
               </a:rPr>
-              <a:t>15</a:t>
+              <a:t>10</a:t>
             </a:r>
             <a:endParaRPr lang="en-US" sz="2600" dirty="0"/>
           </a:p>
@@ -2221,7 +2221,7 @@
                 <a:ea typeface="Georgia" pitchFamily="34" charset="-122"/>
                 <a:cs typeface="Georgia" pitchFamily="34" charset="-120"/>
               </a:rPr>
-              <a:t>$48M</a:t>
+              <a:t>$48.5M</a:t>
             </a:r>
             <a:endParaRPr lang="en-US" sz="2600" dirty="0"/>
           </a:p>
@@ -2659,7 +2659,7 @@
                 <a:ea typeface="Georgia" pitchFamily="34" charset="-122"/>
                 <a:cs typeface="Georgia" pitchFamily="34" charset="-120"/>
               </a:rPr>
-              <a:t>15</a:t>
+              <a:t>10</a:t>
             </a:r>
             <a:endParaRPr lang="en-US" sz="2400" dirty="0"/>
           </a:p>
@@ -2803,7 +2803,7 @@
                 <a:ea typeface="Georgia" pitchFamily="34" charset="-122"/>
                 <a:cs typeface="Georgia" pitchFamily="34" charset="-120"/>
               </a:rPr>
-              <a:t>67.2</a:t>
+              <a:t>65.2</a:t>
             </a:r>
             <a:endParaRPr lang="en-US" sz="2400" dirty="0"/>
           </a:p>
@@ -2947,7 +2947,7 @@
                 <a:ea typeface="Georgia" pitchFamily="34" charset="-122"/>
                 <a:cs typeface="Georgia" pitchFamily="34" charset="-120"/>
               </a:rPr>
-              <a:t>78%</a:t>
+              <a:t>100%</a:t>
             </a:r>
             <a:endParaRPr lang="en-US" sz="2400" dirty="0"/>
           </a:p>
@@ -2986,7 +2986,7 @@
                 <a:ea typeface="Calibri" pitchFamily="34" charset="-122"/>
                 <a:cs typeface="Calibri" pitchFamily="34" charset="-120"/>
               </a:rPr>
-              <a:t>Last 30 days</a:t>
+              <a:t>20 runs closed</a:t>
             </a:r>
             <a:endParaRPr lang="en-US" sz="800" dirty="0"/>
           </a:p>
@@ -3091,7 +3091,7 @@
                 <a:ea typeface="Georgia" pitchFamily="34" charset="-122"/>
                 <a:cs typeface="Georgia" pitchFamily="34" charset="-120"/>
               </a:rPr>
-              <a:t>$17.8M</a:t>
+              <a:t>$21.6M</a:t>
             </a:r>
             <a:endParaRPr lang="en-US" sz="2400" dirty="0"/>
           </a:p>
@@ -3130,7 +3130,7 @@
                 <a:ea typeface="Calibri" pitchFamily="34" charset="-122"/>
                 <a:cs typeface="Calibri" pitchFamily="34" charset="-120"/>
               </a:rPr>
-              <a:t>3 accounts renewing</a:t>
+              <a:t>4 accounts renewing</a:t>
             </a:r>
             <a:endParaRPr lang="en-US" sz="800" dirty="0"/>
           </a:p>
@@ -3274,7 +3274,7 @@
                 <a:ea typeface="Calibri" pitchFamily="34" charset="-122"/>
                 <a:cs typeface="Calibri" pitchFamily="34" charset="-120"/>
               </a:rPr>
-              <a:t>7 accts  |  $22.4M</a:t>
+              <a:t>3 accts  |  $19.5M</a:t>
             </a:r>
             <a:endParaRPr lang="en-US" sz="900" dirty="0"/>
           </a:p>
@@ -3313,7 +3313,7 @@
                 <a:ea typeface="Georgia" pitchFamily="34" charset="-122"/>
                 <a:cs typeface="Georgia" pitchFamily="34" charset="-120"/>
               </a:rPr>
-              <a:t>47%</a:t>
+              <a:t>30%</a:t>
             </a:r>
             <a:endParaRPr lang="en-US" sz="1000" dirty="0"/>
           </a:p>
@@ -3431,7 +3431,7 @@
                 <a:ea typeface="Calibri" pitchFamily="34" charset="-122"/>
                 <a:cs typeface="Calibri" pitchFamily="34" charset="-120"/>
               </a:rPr>
-              <a:t>5 accts  |  $15.8M</a:t>
+              <a:t>6 accts  |  $27.2M</a:t>
             </a:r>
             <a:endParaRPr lang="en-US" sz="900" dirty="0"/>
           </a:p>
@@ -3470,7 +3470,7 @@
                 <a:ea typeface="Georgia" pitchFamily="34" charset="-122"/>
                 <a:cs typeface="Georgia" pitchFamily="34" charset="-120"/>
               </a:rPr>
-              <a:t>33%</a:t>
+              <a:t>60%</a:t>
             </a:r>
             <a:endParaRPr lang="en-US" sz="1000" dirty="0"/>
           </a:p>
@@ -3588,7 +3588,7 @@
                 <a:ea typeface="Calibri" pitchFamily="34" charset="-122"/>
                 <a:cs typeface="Calibri" pitchFamily="34" charset="-120"/>
               </a:rPr>
-              <a:t>3 accts  |  $9.8M</a:t>
+              <a:t>1 acct  |  $1.8M</a:t>
             </a:r>
             <a:endParaRPr lang="en-US" sz="900" dirty="0"/>
           </a:p>
@@ -3627,7 +3627,7 @@
                 <a:ea typeface="Georgia" pitchFamily="34" charset="-122"/>
                 <a:cs typeface="Georgia" pitchFamily="34" charset="-120"/>
               </a:rPr>
-              <a:t>20%</a:t>
+              <a:t>10%</a:t>
             </a:r>
             <a:endParaRPr lang="en-US" sz="1000" dirty="0"/>
           </a:p>
@@ -3850,7 +3850,7 @@
                 <a:ea typeface="Georgia" pitchFamily="34" charset="-122"/>
                 <a:cs typeface="Georgia" pitchFamily="34" charset="-120"/>
               </a:rPr>
-              <a:t>4.2 days</a:t>
+              <a:t>3.8 days</a:t>
             </a:r>
             <a:endParaRPr lang="en-US" sz="1100" dirty="0"/>
           </a:p>
@@ -3967,7 +3967,7 @@
                 <a:ea typeface="Georgia" pitchFamily="34" charset="-122"/>
                 <a:cs typeface="Georgia" pitchFamily="34" charset="-120"/>
               </a:rPr>
-              <a:t>83%</a:t>
+              <a:t>100%</a:t>
             </a:r>
             <a:endParaRPr lang="en-US" sz="1100" dirty="0"/>
           </a:p>
@@ -4201,7 +4201,7 @@
                 <a:ea typeface="Georgia" pitchFamily="34" charset="-122"/>
                 <a:cs typeface="Georgia" pitchFamily="34" charset="-120"/>
               </a:rPr>
-              <a:t>91%</a:t>
+              <a:t>100%</a:t>
             </a:r>
             <a:endParaRPr lang="en-US" sz="1100" dirty="0"/>
           </a:p>
@@ -4886,7 +4886,7 @@
                 <a:ea typeface="Georgia" pitchFamily="34" charset="-122"/>
                 <a:cs typeface="Georgia" pitchFamily="34" charset="-120"/>
               </a:rPr>
-              <a:t>5</a:t>
+              <a:t>3</a:t>
             </a:r>
             <a:endParaRPr lang="en-US" sz="900" dirty="0"/>
           </a:p>
@@ -4925,7 +4925,7 @@
                 <a:ea typeface="Georgia" pitchFamily="34" charset="-122"/>
                 <a:cs typeface="Georgia" pitchFamily="34" charset="-120"/>
               </a:rPr>
-              <a:t>$16M</a:t>
+              <a:t>$16.9M</a:t>
             </a:r>
             <a:endParaRPr lang="en-US" sz="900" dirty="0"/>
           </a:p>
@@ -4964,7 +4964,7 @@
                 <a:ea typeface="Georgia" pitchFamily="34" charset="-122"/>
                 <a:cs typeface="Georgia" pitchFamily="34" charset="-120"/>
               </a:rPr>
-              <a:t>+3.2</a:t>
+              <a:t>+2.8</a:t>
             </a:r>
             <a:endParaRPr lang="en-US" sz="900" dirty="0"/>
           </a:p>
@@ -5003,7 +5003,7 @@
                 <a:ea typeface="Georgia" pitchFamily="34" charset="-122"/>
                 <a:cs typeface="Georgia" pitchFamily="34" charset="-120"/>
               </a:rPr>
-              <a:t>4</a:t>
+              <a:t>2</a:t>
             </a:r>
             <a:endParaRPr lang="en-US" sz="900" dirty="0"/>
           </a:p>
@@ -5042,7 +5042,7 @@
                 <a:ea typeface="Georgia" pitchFamily="34" charset="-122"/>
                 <a:cs typeface="Georgia" pitchFamily="34" charset="-120"/>
               </a:rPr>
-              <a:t>1</a:t>
+              <a:t>0</a:t>
             </a:r>
             <a:endParaRPr lang="en-US" sz="900" dirty="0"/>
           </a:p>
@@ -5081,7 +5081,7 @@
                 <a:ea typeface="Georgia" pitchFamily="34" charset="-122"/>
                 <a:cs typeface="Georgia" pitchFamily="34" charset="-120"/>
               </a:rPr>
-              <a:t>8</a:t>
+              <a:t>6</a:t>
             </a:r>
             <a:endParaRPr lang="en-US" sz="900" dirty="0"/>
           </a:p>
@@ -5120,7 +5120,7 @@
                 <a:ea typeface="Georgia" pitchFamily="34" charset="-122"/>
                 <a:cs typeface="Georgia" pitchFamily="34" charset="-120"/>
               </a:rPr>
-              <a:t>88%</a:t>
+              <a:t>100%</a:t>
             </a:r>
             <a:endParaRPr lang="en-US" sz="900" dirty="0"/>
           </a:p>
@@ -5159,7 +5159,7 @@
                 <a:ea typeface="Georgia" pitchFamily="34" charset="-122"/>
                 <a:cs typeface="Georgia" pitchFamily="34" charset="-120"/>
               </a:rPr>
-              <a:t>$420K</a:t>
+              <a:t>$340K</a:t>
             </a:r>
             <a:endParaRPr lang="en-US" sz="900" dirty="0"/>
           </a:p>
@@ -5257,7 +5257,7 @@
                 <a:ea typeface="Georgia" pitchFamily="34" charset="-122"/>
                 <a:cs typeface="Georgia" pitchFamily="34" charset="-120"/>
               </a:rPr>
-              <a:t>4</a:t>
+              <a:t>3</a:t>
             </a:r>
             <a:endParaRPr lang="en-US" sz="900" dirty="0"/>
           </a:p>
@@ -5296,7 +5296,7 @@
                 <a:ea typeface="Georgia" pitchFamily="34" charset="-122"/>
                 <a:cs typeface="Georgia" pitchFamily="34" charset="-120"/>
               </a:rPr>
-              <a:t>$14M</a:t>
+              <a:t>$14.0M</a:t>
             </a:r>
             <a:endParaRPr lang="en-US" sz="900" dirty="0"/>
           </a:p>
@@ -5335,7 +5335,7 @@
                 <a:ea typeface="Georgia" pitchFamily="34" charset="-122"/>
                 <a:cs typeface="Georgia" pitchFamily="34" charset="-120"/>
               </a:rPr>
-              <a:t>+1.8</a:t>
+              <a:t>+1.5</a:t>
             </a:r>
             <a:endParaRPr lang="en-US" sz="900" dirty="0"/>
           </a:p>
@@ -5374,7 +5374,7 @@
                 <a:ea typeface="Georgia" pitchFamily="34" charset="-122"/>
                 <a:cs typeface="Georgia" pitchFamily="34" charset="-120"/>
               </a:rPr>
-              <a:t>2</a:t>
+              <a:t>1</a:t>
             </a:r>
             <a:endParaRPr lang="en-US" sz="900" dirty="0"/>
           </a:p>
@@ -5452,7 +5452,7 @@
                 <a:ea typeface="Georgia" pitchFamily="34" charset="-122"/>
                 <a:cs typeface="Georgia" pitchFamily="34" charset="-120"/>
               </a:rPr>
-              <a:t>6</a:t>
+              <a:t>5</a:t>
             </a:r>
             <a:endParaRPr lang="en-US" sz="900" dirty="0"/>
           </a:p>
@@ -5491,7 +5491,7 @@
                 <a:ea typeface="Georgia" pitchFamily="34" charset="-122"/>
                 <a:cs typeface="Georgia" pitchFamily="34" charset="-120"/>
               </a:rPr>
-              <a:t>83%</a:t>
+              <a:t>100%</a:t>
             </a:r>
             <a:endParaRPr lang="en-US" sz="900" dirty="0"/>
           </a:p>
@@ -5530,7 +5530,7 @@
                 <a:ea typeface="Georgia" pitchFamily="34" charset="-122"/>
                 <a:cs typeface="Georgia" pitchFamily="34" charset="-120"/>
               </a:rPr>
-              <a:t>$310K</a:t>
+              <a:t>$265K</a:t>
             </a:r>
             <a:endParaRPr lang="en-US" sz="900" dirty="0"/>
           </a:p>
@@ -5628,7 +5628,7 @@
                 <a:ea typeface="Georgia" pitchFamily="34" charset="-122"/>
                 <a:cs typeface="Georgia" pitchFamily="34" charset="-120"/>
               </a:rPr>
-              <a:t>3</a:t>
+              <a:t>2</a:t>
             </a:r>
             <a:endParaRPr lang="en-US" sz="900" dirty="0"/>
           </a:p>
@@ -5667,7 +5667,7 @@
                 <a:ea typeface="Georgia" pitchFamily="34" charset="-122"/>
                 <a:cs typeface="Georgia" pitchFamily="34" charset="-120"/>
               </a:rPr>
-              <a:t>$10M</a:t>
+              <a:t>$10.5M</a:t>
             </a:r>
             <a:endParaRPr lang="en-US" sz="900" dirty="0"/>
           </a:p>
@@ -5706,7 +5706,7 @@
                 <a:ea typeface="Georgia" pitchFamily="34" charset="-122"/>
                 <a:cs typeface="Georgia" pitchFamily="34" charset="-120"/>
               </a:rPr>
-              <a:t>-0.5</a:t>
+              <a:t>-2.3</a:t>
             </a:r>
             <a:endParaRPr lang="en-US" sz="900" dirty="0"/>
           </a:p>
@@ -5745,7 +5745,7 @@
                 <a:ea typeface="Georgia" pitchFamily="34" charset="-122"/>
                 <a:cs typeface="Georgia" pitchFamily="34" charset="-120"/>
               </a:rPr>
-              <a:t>1</a:t>
+              <a:t>0</a:t>
             </a:r>
             <a:endParaRPr lang="en-US" sz="900" dirty="0"/>
           </a:p>
@@ -5823,7 +5823,7 @@
                 <a:ea typeface="Georgia" pitchFamily="34" charset="-122"/>
                 <a:cs typeface="Georgia" pitchFamily="34" charset="-120"/>
               </a:rPr>
-              <a:t>4</a:t>
+              <a:t>5</a:t>
             </a:r>
             <a:endParaRPr lang="en-US" sz="900" dirty="0"/>
           </a:p>
@@ -5862,7 +5862,7 @@
                 <a:ea typeface="Georgia" pitchFamily="34" charset="-122"/>
                 <a:cs typeface="Georgia" pitchFamily="34" charset="-120"/>
               </a:rPr>
-              <a:t>75%</a:t>
+              <a:t>100%</a:t>
             </a:r>
             <a:endParaRPr lang="en-US" sz="900" dirty="0"/>
           </a:p>
@@ -5901,7 +5901,7 @@
                 <a:ea typeface="Georgia" pitchFamily="34" charset="-122"/>
                 <a:cs typeface="Georgia" pitchFamily="34" charset="-120"/>
               </a:rPr>
-              <a:t>$180K</a:t>
+              <a:t>$110K</a:t>
             </a:r>
             <a:endParaRPr lang="en-US" sz="900" dirty="0"/>
           </a:p>
@@ -5999,7 +5999,7 @@
                 <a:ea typeface="Georgia" pitchFamily="34" charset="-122"/>
                 <a:cs typeface="Georgia" pitchFamily="34" charset="-120"/>
               </a:rPr>
-              <a:t>3</a:t>
+              <a:t>2</a:t>
             </a:r>
             <a:endParaRPr lang="en-US" sz="900" dirty="0"/>
           </a:p>
@@ -6038,7 +6038,7 @@
                 <a:ea typeface="Georgia" pitchFamily="34" charset="-122"/>
                 <a:cs typeface="Georgia" pitchFamily="34" charset="-120"/>
               </a:rPr>
-              <a:t>$8M</a:t>
+              <a:t>$7.1M</a:t>
             </a:r>
             <a:endParaRPr lang="en-US" sz="900" dirty="0"/>
           </a:p>
@@ -6077,7 +6077,7 @@
                 <a:ea typeface="Georgia" pitchFamily="34" charset="-122"/>
                 <a:cs typeface="Georgia" pitchFamily="34" charset="-120"/>
               </a:rPr>
-              <a:t>+2.1</a:t>
+              <a:t>+2.0</a:t>
             </a:r>
             <a:endParaRPr lang="en-US" sz="900" dirty="0"/>
           </a:p>
@@ -6116,7 +6116,7 @@
                 <a:ea typeface="Georgia" pitchFamily="34" charset="-122"/>
                 <a:cs typeface="Georgia" pitchFamily="34" charset="-120"/>
               </a:rPr>
-              <a:t>3</a:t>
+              <a:t>1</a:t>
             </a:r>
             <a:endParaRPr lang="en-US" sz="900" dirty="0"/>
           </a:p>
@@ -6194,7 +6194,7 @@
                 <a:ea typeface="Georgia" pitchFamily="34" charset="-122"/>
                 <a:cs typeface="Georgia" pitchFamily="34" charset="-120"/>
               </a:rPr>
-              <a:t>5</a:t>
+              <a:t>4</a:t>
             </a:r>
             <a:endParaRPr lang="en-US" sz="900" dirty="0"/>
           </a:p>
@@ -6233,7 +6233,7 @@
                 <a:ea typeface="Georgia" pitchFamily="34" charset="-122"/>
                 <a:cs typeface="Georgia" pitchFamily="34" charset="-120"/>
               </a:rPr>
-              <a:t>80%</a:t>
+              <a:t>100%</a:t>
             </a:r>
             <a:endParaRPr lang="en-US" sz="900" dirty="0"/>
           </a:p>
@@ -6272,7 +6272,7 @@
                 <a:ea typeface="Georgia" pitchFamily="34" charset="-122"/>
                 <a:cs typeface="Georgia" pitchFamily="34" charset="-120"/>
               </a:rPr>
-              <a:t>$250K</a:t>
+              <a:t>$195K</a:t>
             </a:r>
             <a:endParaRPr lang="en-US" sz="900" dirty="0"/>
           </a:p>
@@ -6377,7 +6377,7 @@
                 <a:ea typeface="Georgia" pitchFamily="34" charset="-122"/>
                 <a:cs typeface="Georgia" pitchFamily="34" charset="-120"/>
               </a:rPr>
-              <a:t>78%</a:t>
+              <a:t>68%</a:t>
             </a:r>
             <a:endParaRPr lang="en-US" sz="3600" dirty="0"/>
           </a:p>
@@ -6612,7 +6612,7 @@
                 <a:ea typeface="Georgia" pitchFamily="34" charset="-122"/>
                 <a:cs typeface="Georgia" pitchFamily="34" charset="-120"/>
               </a:rPr>
-              <a:t>3.8</a:t>
+              <a:t>2.5</a:t>
             </a:r>
             <a:endParaRPr lang="en-US" sz="1000" dirty="0"/>
           </a:p>
@@ -6997,7 +6997,7 @@
                 <a:ea typeface="Calibri" pitchFamily="34" charset="-122"/>
                 <a:cs typeface="Calibri" pitchFamily="34" charset="-120"/>
               </a:rPr>
-              <a:t>200 data points → 10 clear actions</a:t>
+              <a:t>200 data points → 7 clear actions</a:t>
             </a:r>
             <a:endParaRPr lang="en-US" sz="800" dirty="0"/>
           </a:p>
@@ -7473,7 +7473,7 @@
                 <a:ea typeface="Arial" pitchFamily="34" charset="-122"/>
                 <a:cs typeface="Arial" pitchFamily="34" charset="-120"/>
               </a:rPr>
-              <a:t>PB-05</a:t>
+              <a:t>PB-DC-03</a:t>
             </a:r>
             <a:endParaRPr lang="en-US" sz="800" dirty="0"/>
           </a:p>
@@ -7786,7 +7786,7 @@
                 <a:ea typeface="Arial" pitchFamily="34" charset="-122"/>
                 <a:cs typeface="Arial" pitchFamily="34" charset="-120"/>
               </a:rPr>
-              <a:t>PB-SYS-04</a:t>
+              <a:t>PB-DC-01</a:t>
             </a:r>
             <a:endParaRPr lang="en-US" sz="800" dirty="0"/>
           </a:p>
@@ -8099,7 +8099,7 @@
                 <a:ea typeface="Arial" pitchFamily="34" charset="-122"/>
                 <a:cs typeface="Arial" pitchFamily="34" charset="-120"/>
               </a:rPr>
-              <a:t>PB-06</a:t>
+              <a:t>PB-DC-04</a:t>
             </a:r>
             <a:endParaRPr lang="en-US" sz="800" dirty="0"/>
           </a:p>
@@ -8334,7 +8334,7 @@
                 <a:ea typeface="Calibri" pitchFamily="34" charset="-122"/>
                 <a:cs typeface="Calibri" pitchFamily="34" charset="-120"/>
               </a:rPr>
-              <a:t>TechGrid Corp</a:t>
+              <a:t>Stratos Logistics</a:t>
             </a:r>
             <a:endParaRPr lang="en-US" sz="900" dirty="0"/>
           </a:p>
@@ -8412,7 +8412,7 @@
                 <a:ea typeface="Arial" pitchFamily="34" charset="-122"/>
                 <a:cs typeface="Arial" pitchFamily="34" charset="-120"/>
               </a:rPr>
-              <a:t>PB-01</a:t>
+              <a:t>PB-DC-04</a:t>
             </a:r>
             <a:endParaRPr lang="en-US" sz="800" dirty="0"/>
           </a:p>
@@ -8549,7 +8549,7 @@
                 <a:ea typeface="Georgia" pitchFamily="34" charset="-122"/>
                 <a:cs typeface="Georgia" pitchFamily="34" charset="-120"/>
               </a:rPr>
-              <a:t>$2.6M</a:t>
+              <a:t>$5.8M</a:t>
             </a:r>
             <a:endParaRPr lang="en-US" sz="1000" dirty="0"/>
           </a:p>
@@ -8647,7 +8647,7 @@
                 <a:ea typeface="Calibri" pitchFamily="34" charset="-122"/>
                 <a:cs typeface="Calibri" pitchFamily="34" charset="-120"/>
               </a:rPr>
-              <a:t>Apex Dynamics</a:t>
+              <a:t>Horizon Fintech</a:t>
             </a:r>
             <a:endParaRPr lang="en-US" sz="900" dirty="0"/>
           </a:p>
@@ -8725,7 +8725,7 @@
                 <a:ea typeface="Arial" pitchFamily="34" charset="-122"/>
                 <a:cs typeface="Arial" pitchFamily="34" charset="-120"/>
               </a:rPr>
-              <a:t>PB-04</a:t>
+              <a:t>PB-DC-02</a:t>
             </a:r>
             <a:endParaRPr lang="en-US" sz="800" dirty="0"/>
           </a:p>
@@ -8784,7 +8784,7 @@
                 <a:ea typeface="Arial" pitchFamily="34" charset="-122"/>
                 <a:cs typeface="Arial" pitchFamily="34" charset="-120"/>
               </a:rPr>
-              <a:t>Medium</a:t>
+              <a:t>High</a:t>
             </a:r>
             <a:endParaRPr lang="en-US" sz="700" dirty="0"/>
           </a:p>
@@ -8862,7 +8862,7 @@
                 <a:ea typeface="Georgia" pitchFamily="34" charset="-122"/>
                 <a:cs typeface="Georgia" pitchFamily="34" charset="-120"/>
               </a:rPr>
-              <a:t>$6.1M</a:t>
+              <a:t>$7.2M</a:t>
             </a:r>
             <a:endParaRPr lang="en-US" sz="1000" dirty="0"/>
           </a:p>
@@ -8960,7 +8960,7 @@
                 <a:ea typeface="Calibri" pitchFamily="34" charset="-122"/>
                 <a:cs typeface="Calibri" pitchFamily="34" charset="-120"/>
               </a:rPr>
-              <a:t>Horizon Labs</a:t>
+              <a:t>Orbit Commerce</a:t>
             </a:r>
             <a:endParaRPr lang="en-US" sz="900" dirty="0"/>
           </a:p>
@@ -8999,7 +8999,7 @@
                 <a:ea typeface="Calibri" pitchFamily="34" charset="-122"/>
                 <a:cs typeface="Calibri" pitchFamily="34" charset="-120"/>
               </a:rPr>
-              <a:t>Stakeholder mapping refresh</a:t>
+              <a:t>Stakeholder map refresh (expansion)</a:t>
             </a:r>
             <a:endParaRPr lang="en-US" sz="900" dirty="0"/>
           </a:p>
@@ -9038,7 +9038,7 @@
                 <a:ea typeface="Arial" pitchFamily="34" charset="-122"/>
                 <a:cs typeface="Arial" pitchFamily="34" charset="-120"/>
               </a:rPr>
-              <a:t>PB-06</a:t>
+              <a:t>PB-DC-02</a:t>
             </a:r>
             <a:endParaRPr lang="en-US" sz="800" dirty="0"/>
           </a:p>
@@ -9175,7 +9175,7 @@
                 <a:ea typeface="Georgia" pitchFamily="34" charset="-122"/>
                 <a:cs typeface="Georgia" pitchFamily="34" charset="-120"/>
               </a:rPr>
-              <a:t>$3.2M</a:t>
+              <a:t>$8.2M</a:t>
             </a:r>
             <a:endParaRPr lang="en-US" sz="1000" dirty="0"/>
           </a:p>
@@ -9273,7 +9273,7 @@
                 <a:ea typeface="Calibri" pitchFamily="34" charset="-122"/>
                 <a:cs typeface="Calibri" pitchFamily="34" charset="-120"/>
               </a:rPr>
-              <a:t>Summit Data</a:t>
+              <a:t>Nexus Enterprise</a:t>
             </a:r>
             <a:endParaRPr lang="en-US" sz="900" dirty="0"/>
           </a:p>
@@ -9351,7 +9351,7 @@
                 <a:ea typeface="Arial" pitchFamily="34" charset="-122"/>
                 <a:cs typeface="Arial" pitchFamily="34" charset="-120"/>
               </a:rPr>
-              <a:t>PB-04</a:t>
+              <a:t>PB-DC-02</a:t>
             </a:r>
             <a:endParaRPr lang="en-US" sz="800" dirty="0"/>
           </a:p>
@@ -9488,7 +9488,7 @@
                 <a:ea typeface="Georgia" pitchFamily="34" charset="-122"/>
                 <a:cs typeface="Georgia" pitchFamily="34" charset="-120"/>
               </a:rPr>
-              <a:t>$5.4M</a:t>
+              <a:t>$6.5M</a:t>
             </a:r>
             <a:endParaRPr lang="en-US" sz="1000" dirty="0"/>
           </a:p>
@@ -9567,7 +9567,7 @@
                 <a:ea typeface="Calibri" pitchFamily="34" charset="-122"/>
                 <a:cs typeface="Calibri" pitchFamily="34" charset="-120"/>
               </a:rPr>
-              <a:t>From 200 data points to 10 clear actions, ranked by dollar impact</a:t>
+              <a:t>From 200 data points to 7 clear actions, ranked by dollar impact</a:t>
             </a:r>
             <a:endParaRPr lang="en-US" sz="1100" dirty="0"/>
           </a:p>
@@ -9802,7 +9802,7 @@
                 <a:ea typeface="Georgia" pitchFamily="34" charset="-122"/>
                 <a:cs typeface="Georgia" pitchFamily="34" charset="-120"/>
               </a:rPr>
-              <a:t>3</a:t>
+              <a:t>4</a:t>
             </a:r>
             <a:endParaRPr lang="en-US" sz="2400" dirty="0"/>
           </a:p>
@@ -9946,7 +9946,7 @@
                 <a:ea typeface="Georgia" pitchFamily="34" charset="-122"/>
                 <a:cs typeface="Georgia" pitchFamily="34" charset="-120"/>
               </a:rPr>
-              <a:t>$17.8M</a:t>
+              <a:t>$21.6M</a:t>
             </a:r>
             <a:endParaRPr lang="en-US" sz="2400" dirty="0"/>
           </a:p>
@@ -10090,7 +10090,7 @@
                 <a:ea typeface="Georgia" pitchFamily="34" charset="-122"/>
                 <a:cs typeface="Georgia" pitchFamily="34" charset="-120"/>
               </a:rPr>
-              <a:t>2</a:t>
+              <a:t>3</a:t>
             </a:r>
             <a:endParaRPr lang="en-US" sz="2400" dirty="0"/>
           </a:p>
@@ -10488,7 +10488,7 @@
                 <a:ea typeface="Calibri" pitchFamily="34" charset="-122"/>
                 <a:cs typeface="Calibri" pitchFamily="34" charset="-120"/>
               </a:rPr>
-              <a:t>Drift Analytics</a:t>
+              <a:t>Relay Healthcare</a:t>
             </a:r>
             <a:endParaRPr lang="en-US" sz="900" dirty="0"/>
           </a:p>
@@ -10527,7 +10527,7 @@
                 <a:ea typeface="Georgia" pitchFamily="34" charset="-122"/>
                 <a:cs typeface="Georgia" pitchFamily="34" charset="-120"/>
               </a:rPr>
-              <a:t>$1.8M</a:t>
+              <a:t>$3.8M</a:t>
             </a:r>
             <a:endParaRPr lang="en-US" sz="900" dirty="0"/>
           </a:p>
@@ -10566,7 +10566,7 @@
                 <a:ea typeface="Calibri" pitchFamily="34" charset="-122"/>
                 <a:cs typeface="Calibri" pitchFamily="34" charset="-120"/>
               </a:rPr>
-              <a:t>May 15</a:t>
+              <a:t>Apr 15</a:t>
             </a:r>
             <a:endParaRPr lang="en-US" sz="900" dirty="0"/>
           </a:p>
@@ -10605,7 +10605,7 @@
                 <a:ea typeface="Georgia" pitchFamily="34" charset="-122"/>
                 <a:cs typeface="Georgia" pitchFamily="34" charset="-120"/>
               </a:rPr>
-              <a:t>29d</a:t>
+              <a:t>-6d</a:t>
             </a:r>
             <a:endParaRPr lang="en-US" sz="1000" dirty="0"/>
           </a:p>
@@ -10644,7 +10644,7 @@
                 <a:ea typeface="Georgia" pitchFamily="34" charset="-122"/>
                 <a:cs typeface="Georgia" pitchFamily="34" charset="-120"/>
               </a:rPr>
-              <a:t>42</a:t>
+              <a:t>56</a:t>
             </a:r>
             <a:endParaRPr lang="en-US" sz="1000" dirty="0"/>
           </a:p>
@@ -10742,7 +10742,7 @@
                 <a:ea typeface="Calibri" pitchFamily="34" charset="-122"/>
                 <a:cs typeface="Calibri" pitchFamily="34" charset="-120"/>
               </a:rPr>
-              <a:t>Silent Churn</a:t>
+              <a:t>Exec Sponsor Loss</a:t>
             </a:r>
             <a:endParaRPr lang="en-US" sz="800" dirty="0"/>
           </a:p>
@@ -10781,7 +10781,7 @@
                 <a:ea typeface="Calibri" pitchFamily="34" charset="-122"/>
                 <a:cs typeface="Calibri" pitchFamily="34" charset="-120"/>
               </a:rPr>
-              <a:t>Relay Healthcare</a:t>
+              <a:t>Stratos Logistics</a:t>
             </a:r>
             <a:endParaRPr lang="en-US" sz="900" dirty="0"/>
           </a:p>
@@ -10820,7 +10820,7 @@
                 <a:ea typeface="Georgia" pitchFamily="34" charset="-122"/>
                 <a:cs typeface="Georgia" pitchFamily="34" charset="-120"/>
               </a:rPr>
-              <a:t>$3.8M</a:t>
+              <a:t>$5.8M</a:t>
             </a:r>
             <a:endParaRPr lang="en-US" sz="900" dirty="0"/>
           </a:p>
@@ -10859,7 +10859,7 @@
                 <a:ea typeface="Calibri" pitchFamily="34" charset="-122"/>
                 <a:cs typeface="Calibri" pitchFamily="34" charset="-120"/>
               </a:rPr>
-              <a:t>Jun 22</a:t>
+              <a:t>May 1</a:t>
             </a:r>
             <a:endParaRPr lang="en-US" sz="900" dirty="0"/>
           </a:p>
@@ -10898,7 +10898,7 @@
                 <a:ea typeface="Georgia" pitchFamily="34" charset="-122"/>
                 <a:cs typeface="Georgia" pitchFamily="34" charset="-120"/>
               </a:rPr>
-              <a:t>67d</a:t>
+              <a:t>10d</a:t>
             </a:r>
             <a:endParaRPr lang="en-US" sz="1000" dirty="0"/>
           </a:p>
@@ -10937,7 +10937,7 @@
                 <a:ea typeface="Georgia" pitchFamily="34" charset="-122"/>
                 <a:cs typeface="Georgia" pitchFamily="34" charset="-120"/>
               </a:rPr>
-              <a:t>56</a:t>
+              <a:t>58</a:t>
             </a:r>
             <a:endParaRPr lang="en-US" sz="1000" dirty="0"/>
           </a:p>
@@ -11035,7 +11035,7 @@
                 <a:ea typeface="Calibri" pitchFamily="34" charset="-122"/>
                 <a:cs typeface="Calibri" pitchFamily="34" charset="-120"/>
               </a:rPr>
-              <a:t>Exec Sponsor Loss</a:t>
+              <a:t>Competitive Displacement</a:t>
             </a:r>
             <a:endParaRPr lang="en-US" sz="800" dirty="0"/>
           </a:p>
@@ -11074,7 +11074,7 @@
                 <a:ea typeface="Calibri" pitchFamily="34" charset="-122"/>
                 <a:cs typeface="Calibri" pitchFamily="34" charset="-120"/>
               </a:rPr>
-              <a:t>Canopy EdTech</a:t>
+              <a:t>Drift Analytics</a:t>
             </a:r>
             <a:endParaRPr lang="en-US" sz="900" dirty="0"/>
           </a:p>
@@ -11113,7 +11113,7 @@
                 <a:ea typeface="Georgia" pitchFamily="34" charset="-122"/>
                 <a:cs typeface="Georgia" pitchFamily="34" charset="-120"/>
               </a:rPr>
-              <a:t>$4.2M</a:t>
+              <a:t>$1.8M</a:t>
             </a:r>
             <a:endParaRPr lang="en-US" sz="900" dirty="0"/>
           </a:p>
@@ -11152,7 +11152,7 @@
                 <a:ea typeface="Calibri" pitchFamily="34" charset="-122"/>
                 <a:cs typeface="Calibri" pitchFamily="34" charset="-120"/>
               </a:rPr>
-              <a:t>Jul 10</a:t>
+              <a:t>Mar 1</a:t>
             </a:r>
             <a:endParaRPr lang="en-US" sz="900" dirty="0"/>
           </a:p>
@@ -11191,7 +11191,7 @@
                 <a:ea typeface="Georgia" pitchFamily="34" charset="-122"/>
                 <a:cs typeface="Georgia" pitchFamily="34" charset="-120"/>
               </a:rPr>
-              <a:t>85d</a:t>
+              <a:t>-51d</a:t>
             </a:r>
             <a:endParaRPr lang="en-US" sz="1000" dirty="0"/>
           </a:p>
@@ -11230,7 +11230,7 @@
                 <a:ea typeface="Georgia" pitchFamily="34" charset="-122"/>
                 <a:cs typeface="Georgia" pitchFamily="34" charset="-120"/>
               </a:rPr>
-              <a:t>57</a:t>
+              <a:t>42</a:t>
             </a:r>
             <a:endParaRPr lang="en-US" sz="1000" dirty="0"/>
           </a:p>
@@ -11289,7 +11289,7 @@
                 <a:ea typeface="Arial" pitchFamily="34" charset="-122"/>
                 <a:cs typeface="Arial" pitchFamily="34" charset="-120"/>
               </a:rPr>
-              <a:t>At Risk</a:t>
+              <a:t>Critical</a:t>
             </a:r>
             <a:endParaRPr lang="en-US" sz="700" dirty="0"/>
           </a:p>
@@ -11328,7 +11328,7 @@
                 <a:ea typeface="Calibri" pitchFamily="34" charset="-122"/>
                 <a:cs typeface="Calibri" pitchFamily="34" charset="-120"/>
               </a:rPr>
-              <a:t>Competitive Displacement</a:t>
+              <a:t>Silent Churn</a:t>
             </a:r>
             <a:endParaRPr lang="en-US" sz="800" dirty="0"/>
           </a:p>
@@ -11367,7 +11367,7 @@
                 <a:ea typeface="Calibri" pitchFamily="34" charset="-122"/>
                 <a:cs typeface="Calibri" pitchFamily="34" charset="-120"/>
               </a:rPr>
-              <a:t>Summit Data</a:t>
+              <a:t>Horizon Fintech</a:t>
             </a:r>
             <a:endParaRPr lang="en-US" sz="900" dirty="0"/>
           </a:p>
@@ -11406,7 +11406,7 @@
                 <a:ea typeface="Georgia" pitchFamily="34" charset="-122"/>
                 <a:cs typeface="Georgia" pitchFamily="34" charset="-120"/>
               </a:rPr>
-              <a:t>$5.4M</a:t>
+              <a:t>$7.2M</a:t>
             </a:r>
             <a:endParaRPr lang="en-US" sz="900" dirty="0"/>
           </a:p>
@@ -11445,7 +11445,7 @@
                 <a:ea typeface="Calibri" pitchFamily="34" charset="-122"/>
                 <a:cs typeface="Calibri" pitchFamily="34" charset="-120"/>
               </a:rPr>
-              <a:t>Jul 28</a:t>
+              <a:t>Jun 15</a:t>
             </a:r>
             <a:endParaRPr lang="en-US" sz="900" dirty="0"/>
           </a:p>
@@ -11484,7 +11484,7 @@
                 <a:ea typeface="Georgia" pitchFamily="34" charset="-122"/>
                 <a:cs typeface="Georgia" pitchFamily="34" charset="-120"/>
               </a:rPr>
-              <a:t>103d</a:t>
+              <a:t>55d</a:t>
             </a:r>
             <a:endParaRPr lang="en-US" sz="1000" dirty="0"/>
           </a:p>
@@ -11523,7 +11523,7 @@
                 <a:ea typeface="Georgia" pitchFamily="34" charset="-122"/>
                 <a:cs typeface="Georgia" pitchFamily="34" charset="-120"/>
               </a:rPr>
-              <a:t>72</a:t>
+              <a:t>61</a:t>
             </a:r>
             <a:endParaRPr lang="en-US" sz="1000" dirty="0"/>
           </a:p>
@@ -11582,7 +11582,7 @@
                 <a:ea typeface="Arial" pitchFamily="34" charset="-122"/>
                 <a:cs typeface="Arial" pitchFamily="34" charset="-120"/>
               </a:rPr>
-              <a:t>Healthy</a:t>
+              <a:t>At Risk</a:t>
             </a:r>
             <a:endParaRPr lang="en-US" sz="700" dirty="0"/>
           </a:p>
@@ -11621,7 +11621,7 @@
                 <a:ea typeface="Calibri" pitchFamily="34" charset="-122"/>
                 <a:cs typeface="Calibri" pitchFamily="34" charset="-120"/>
               </a:rPr>
-              <a:t>—</a:t>
+              <a:t>Competitive Recovery</a:t>
             </a:r>
             <a:endParaRPr lang="en-US" sz="800" dirty="0"/>
           </a:p>
@@ -11660,7 +11660,7 @@
                 <a:ea typeface="Calibri" pitchFamily="34" charset="-122"/>
                 <a:cs typeface="Calibri" pitchFamily="34" charset="-120"/>
               </a:rPr>
-              <a:t>Apex Dynamics</a:t>
+              <a:t>Verdant Media</a:t>
             </a:r>
             <a:endParaRPr lang="en-US" sz="900" dirty="0"/>
           </a:p>
@@ -11699,7 +11699,7 @@
                 <a:ea typeface="Georgia" pitchFamily="34" charset="-122"/>
                 <a:cs typeface="Georgia" pitchFamily="34" charset="-120"/>
               </a:rPr>
-              <a:t>$6.1M</a:t>
+              <a:t>$4.8M</a:t>
             </a:r>
             <a:endParaRPr lang="en-US" sz="900" dirty="0"/>
           </a:p>
@@ -11738,7 +11738,7 @@
                 <a:ea typeface="Calibri" pitchFamily="34" charset="-122"/>
                 <a:cs typeface="Calibri" pitchFamily="34" charset="-120"/>
               </a:rPr>
-              <a:t>Aug 10</a:t>
+              <a:t>Jul 1</a:t>
             </a:r>
             <a:endParaRPr lang="en-US" sz="900" dirty="0"/>
           </a:p>
@@ -11777,7 +11777,7 @@
                 <a:ea typeface="Georgia" pitchFamily="34" charset="-122"/>
                 <a:cs typeface="Georgia" pitchFamily="34" charset="-120"/>
               </a:rPr>
-              <a:t>116d</a:t>
+              <a:t>71d</a:t>
             </a:r>
             <a:endParaRPr lang="en-US" sz="1000" dirty="0"/>
           </a:p>
@@ -11816,7 +11816,7 @@
                 <a:ea typeface="Georgia" pitchFamily="34" charset="-122"/>
                 <a:cs typeface="Georgia" pitchFamily="34" charset="-120"/>
               </a:rPr>
-              <a:t>78</a:t>
+              <a:t>74</a:t>
             </a:r>
             <a:endParaRPr lang="en-US" sz="1000" dirty="0"/>
           </a:p>
@@ -11914,7 +11914,7 @@
                 <a:ea typeface="Calibri" pitchFamily="34" charset="-122"/>
                 <a:cs typeface="Calibri" pitchFamily="34" charset="-120"/>
               </a:rPr>
-              <a:t>Expansion Champion</a:t>
+              <a:t>—</a:t>
             </a:r>
             <a:endParaRPr lang="en-US" sz="800" dirty="0"/>
           </a:p>
@@ -12521,7 +12521,7 @@
                 <a:ea typeface="Georgia" pitchFamily="34" charset="-122"/>
                 <a:cs typeface="Georgia" pitchFamily="34" charset="-120"/>
               </a:rPr>
-              <a:t>12</a:t>
+              <a:t>1</a:t>
             </a:r>
             <a:endParaRPr lang="en-US" sz="900" dirty="0"/>
           </a:p>
@@ -12560,7 +12560,7 @@
                 <a:ea typeface="Georgia" pitchFamily="34" charset="-122"/>
                 <a:cs typeface="Georgia" pitchFamily="34" charset="-120"/>
               </a:rPr>
-              <a:t>10</a:t>
+              <a:t>1</a:t>
             </a:r>
             <a:endParaRPr lang="en-US" sz="900" dirty="0"/>
           </a:p>
@@ -12599,7 +12599,7 @@
                 <a:ea typeface="Georgia" pitchFamily="34" charset="-122"/>
                 <a:cs typeface="Georgia" pitchFamily="34" charset="-120"/>
               </a:rPr>
-              <a:t>83%</a:t>
+              <a:t>100%</a:t>
             </a:r>
             <a:endParaRPr lang="en-US" sz="900" dirty="0"/>
           </a:p>
@@ -12638,7 +12638,7 @@
                 <a:ea typeface="Georgia" pitchFamily="34" charset="-122"/>
                 <a:cs typeface="Georgia" pitchFamily="34" charset="-120"/>
               </a:rPr>
-              <a:t>+8.4</a:t>
+              <a:t>+5.0</a:t>
             </a:r>
             <a:endParaRPr lang="en-US" sz="900" dirty="0"/>
           </a:p>
@@ -12716,7 +12716,7 @@
                 <a:ea typeface="Calibri" pitchFamily="34" charset="-122"/>
                 <a:cs typeface="Calibri" pitchFamily="34" charset="-120"/>
               </a:rPr>
-              <a:t>Deployment Accel</a:t>
+              <a:t>Champion Recovery</a:t>
             </a:r>
             <a:endParaRPr lang="en-US" sz="900" dirty="0"/>
           </a:p>
@@ -12794,7 +12794,7 @@
                 <a:ea typeface="Georgia" pitchFamily="34" charset="-122"/>
                 <a:cs typeface="Georgia" pitchFamily="34" charset="-120"/>
               </a:rPr>
-              <a:t>7</a:t>
+              <a:t>8</a:t>
             </a:r>
             <a:endParaRPr lang="en-US" sz="900" dirty="0"/>
           </a:p>
@@ -12833,7 +12833,7 @@
                 <a:ea typeface="Georgia" pitchFamily="34" charset="-122"/>
                 <a:cs typeface="Georgia" pitchFamily="34" charset="-120"/>
               </a:rPr>
-              <a:t>88%</a:t>
+              <a:t>100%</a:t>
             </a:r>
             <a:endParaRPr lang="en-US" sz="900" dirty="0"/>
           </a:p>
@@ -12872,7 +12872,7 @@
                 <a:ea typeface="Georgia" pitchFamily="34" charset="-122"/>
                 <a:cs typeface="Georgia" pitchFamily="34" charset="-120"/>
               </a:rPr>
-              <a:t>+5.2</a:t>
+              <a:t>+4.2</a:t>
             </a:r>
             <a:endParaRPr lang="en-US" sz="900" dirty="0"/>
           </a:p>
@@ -12911,7 +12911,7 @@
                 <a:ea typeface="Georgia" pitchFamily="34" charset="-122"/>
                 <a:cs typeface="Georgia" pitchFamily="34" charset="-120"/>
               </a:rPr>
-              <a:t>$890K</a:t>
+              <a:t>$3.8M</a:t>
             </a:r>
             <a:endParaRPr lang="en-US" sz="900" dirty="0"/>
           </a:p>
@@ -12950,7 +12950,7 @@
                 <a:ea typeface="Calibri" pitchFamily="34" charset="-122"/>
                 <a:cs typeface="Calibri" pitchFamily="34" charset="-120"/>
               </a:rPr>
-              <a:t>Expansion Opp</a:t>
+              <a:t>Expansion Discovery</a:t>
             </a:r>
             <a:endParaRPr lang="en-US" sz="900" dirty="0"/>
           </a:p>
@@ -12989,7 +12989,7 @@
                 <a:ea typeface="Georgia" pitchFamily="34" charset="-122"/>
                 <a:cs typeface="Georgia" pitchFamily="34" charset="-120"/>
               </a:rPr>
-              <a:t>6</a:t>
+              <a:t>4</a:t>
             </a:r>
             <a:endParaRPr lang="en-US" sz="900" dirty="0"/>
           </a:p>
@@ -13028,7 +13028,7 @@
                 <a:ea typeface="Georgia" pitchFamily="34" charset="-122"/>
                 <a:cs typeface="Georgia" pitchFamily="34" charset="-120"/>
               </a:rPr>
-              <a:t>5</a:t>
+              <a:t>4</a:t>
             </a:r>
             <a:endParaRPr lang="en-US" sz="900" dirty="0"/>
           </a:p>
@@ -13067,7 +13067,7 @@
                 <a:ea typeface="Georgia" pitchFamily="34" charset="-122"/>
                 <a:cs typeface="Georgia" pitchFamily="34" charset="-120"/>
               </a:rPr>
-              <a:t>83%</a:t>
+              <a:t>100%</a:t>
             </a:r>
             <a:endParaRPr lang="en-US" sz="900" dirty="0"/>
           </a:p>
@@ -13106,7 +13106,7 @@
                 <a:ea typeface="Georgia" pitchFamily="34" charset="-122"/>
                 <a:cs typeface="Georgia" pitchFamily="34" charset="-120"/>
               </a:rPr>
-              <a:t>+3.1</a:t>
+              <a:t>+3.8</a:t>
             </a:r>
             <a:endParaRPr lang="en-US" sz="900" dirty="0"/>
           </a:p>
@@ -13145,7 +13145,7 @@
                 <a:ea typeface="Georgia" pitchFamily="34" charset="-122"/>
                 <a:cs typeface="Georgia" pitchFamily="34" charset="-120"/>
               </a:rPr>
-              <a:t>$2.1M</a:t>
+              <a:t>$2.98M + $5.53M pipeline</a:t>
             </a:r>
             <a:endParaRPr lang="en-US" sz="900" dirty="0"/>
           </a:p>
@@ -13184,7 +13184,7 @@
                 <a:ea typeface="Calibri" pitchFamily="34" charset="-122"/>
                 <a:cs typeface="Calibri" pitchFamily="34" charset="-120"/>
               </a:rPr>
-              <a:t>Champion Recovery</a:t>
+              <a:t>Deployment Recovery</a:t>
             </a:r>
             <a:endParaRPr lang="en-US" sz="900" dirty="0"/>
           </a:p>
@@ -13223,7 +13223,7 @@
                 <a:ea typeface="Georgia" pitchFamily="34" charset="-122"/>
                 <a:cs typeface="Georgia" pitchFamily="34" charset="-120"/>
               </a:rPr>
-              <a:t>4</a:t>
+              <a:t>7</a:t>
             </a:r>
             <a:endParaRPr lang="en-US" sz="900" dirty="0"/>
           </a:p>
@@ -13262,7 +13262,7 @@
                 <a:ea typeface="Georgia" pitchFamily="34" charset="-122"/>
                 <a:cs typeface="Georgia" pitchFamily="34" charset="-120"/>
               </a:rPr>
-              <a:t>3</a:t>
+              <a:t>7</a:t>
             </a:r>
             <a:endParaRPr lang="en-US" sz="900" dirty="0"/>
           </a:p>
@@ -13301,7 +13301,7 @@
                 <a:ea typeface="Georgia" pitchFamily="34" charset="-122"/>
                 <a:cs typeface="Georgia" pitchFamily="34" charset="-120"/>
               </a:rPr>
-              <a:t>75%</a:t>
+              <a:t>100%</a:t>
             </a:r>
             <a:endParaRPr lang="en-US" sz="900" dirty="0"/>
           </a:p>
@@ -13340,7 +13340,7 @@
                 <a:ea typeface="Georgia" pitchFamily="34" charset="-122"/>
                 <a:cs typeface="Georgia" pitchFamily="34" charset="-120"/>
               </a:rPr>
-              <a:t>+4.6</a:t>
+              <a:t>+2.9</a:t>
             </a:r>
             <a:endParaRPr lang="en-US" sz="900" dirty="0"/>
           </a:p>
@@ -13379,7 +13379,7 @@
                 <a:ea typeface="Georgia" pitchFamily="34" charset="-122"/>
                 <a:cs typeface="Georgia" pitchFamily="34" charset="-120"/>
               </a:rPr>
-              <a:t>$680K</a:t>
+              <a:t>$890K</a:t>
             </a:r>
             <a:endParaRPr lang="en-US" sz="900" dirty="0"/>
           </a:p>
@@ -13418,7 +13418,7 @@
                 <a:ea typeface="Calibri" pitchFamily="34" charset="-122"/>
                 <a:cs typeface="Calibri" pitchFamily="34" charset="-120"/>
               </a:rPr>
-              <a:t>QBR Engagement</a:t>
+              <a:t>—</a:t>
             </a:r>
             <a:endParaRPr lang="en-US" sz="900" dirty="0"/>
           </a:p>
@@ -13457,7 +13457,7 @@
                 <a:ea typeface="Georgia" pitchFamily="34" charset="-122"/>
                 <a:cs typeface="Georgia" pitchFamily="34" charset="-120"/>
               </a:rPr>
-              <a:t>10</a:t>
+              <a:t>—</a:t>
             </a:r>
             <a:endParaRPr lang="en-US" sz="900" dirty="0"/>
           </a:p>
@@ -13496,7 +13496,7 @@
                 <a:ea typeface="Georgia" pitchFamily="34" charset="-122"/>
                 <a:cs typeface="Georgia" pitchFamily="34" charset="-120"/>
               </a:rPr>
-              <a:t>9</a:t>
+              <a:t>—</a:t>
             </a:r>
             <a:endParaRPr lang="en-US" sz="900" dirty="0"/>
           </a:p>
@@ -13535,7 +13535,7 @@
                 <a:ea typeface="Georgia" pitchFamily="34" charset="-122"/>
                 <a:cs typeface="Georgia" pitchFamily="34" charset="-120"/>
               </a:rPr>
-              <a:t>90%</a:t>
+              <a:t>—</a:t>
             </a:r>
             <a:endParaRPr lang="en-US" sz="900" dirty="0"/>
           </a:p>
@@ -13574,7 +13574,7 @@
                 <a:ea typeface="Georgia" pitchFamily="34" charset="-122"/>
                 <a:cs typeface="Georgia" pitchFamily="34" charset="-120"/>
               </a:rPr>
-              <a:t>+2.8</a:t>
+              <a:t>—</a:t>
             </a:r>
             <a:endParaRPr lang="en-US" sz="900" dirty="0"/>
           </a:p>
@@ -13613,7 +13613,7 @@
                 <a:ea typeface="Georgia" pitchFamily="34" charset="-122"/>
                 <a:cs typeface="Georgia" pitchFamily="34" charset="-120"/>
               </a:rPr>
-              <a:t>$420K</a:t>
+              <a:t>—</a:t>
             </a:r>
             <a:endParaRPr lang="en-US" sz="900" dirty="0"/>
           </a:p>
@@ -13816,7 +13816,7 @@
                 <a:ea typeface="Georgia" pitchFamily="34" charset="-122"/>
                 <a:cs typeface="Georgia" pitchFamily="34" charset="-120"/>
               </a:rPr>
-              <a:t>320 hrs</a:t>
+              <a:t>120 hrs</a:t>
             </a:r>
             <a:endParaRPr lang="en-US" sz="1000" dirty="0"/>
           </a:p>
@@ -13894,7 +13894,7 @@
                 <a:ea typeface="Georgia" pitchFamily="34" charset="-122"/>
                 <a:cs typeface="Georgia" pitchFamily="34" charset="-120"/>
               </a:rPr>
-              <a:t>$24K</a:t>
+              <a:t>$91K</a:t>
             </a:r>
             <a:endParaRPr lang="en-US" sz="1000" dirty="0"/>
           </a:p>
@@ -13972,7 +13972,7 @@
                 <a:ea typeface="Georgia" pitchFamily="34" charset="-122"/>
                 <a:cs typeface="Georgia" pitchFamily="34" charset="-120"/>
               </a:rPr>
-              <a:t>$89K</a:t>
+              <a:t>$485K</a:t>
             </a:r>
             <a:endParaRPr lang="en-US" sz="1000" dirty="0"/>
           </a:p>
@@ -14070,7 +14070,7 @@
                 <a:ea typeface="Georgia" pitchFamily="34" charset="-122"/>
                 <a:cs typeface="Georgia" pitchFamily="34" charset="-120"/>
               </a:rPr>
-              <a:t>$2.1M</a:t>
+              <a:t>$8.3M</a:t>
             </a:r>
             <a:endParaRPr lang="en-US" sz="1000" dirty="0"/>
           </a:p>
@@ -14148,7 +14148,7 @@
                 <a:ea typeface="Georgia" pitchFamily="34" charset="-122"/>
                 <a:cs typeface="Georgia" pitchFamily="34" charset="-120"/>
               </a:rPr>
-              <a:t>$1.4M</a:t>
+              <a:t>$2.98M (+ $5.53M pipeline)</a:t>
             </a:r>
             <a:endParaRPr lang="en-US" sz="1000" dirty="0"/>
           </a:p>
@@ -14226,7 +14226,7 @@
                 <a:ea typeface="Georgia" pitchFamily="34" charset="-122"/>
                 <a:cs typeface="Georgia" pitchFamily="34" charset="-120"/>
               </a:rPr>
-              <a:t>$3.5M</a:t>
+              <a:t>$11.28M</a:t>
             </a:r>
             <a:endParaRPr lang="en-US" sz="1000" dirty="0"/>
           </a:p>
@@ -14324,7 +14324,7 @@
                 <a:ea typeface="Georgia" pitchFamily="34" charset="-122"/>
                 <a:cs typeface="Georgia" pitchFamily="34" charset="-120"/>
               </a:rPr>
-              <a:t>39.3x</a:t>
+              <a:t>23x</a:t>
             </a:r>
             <a:endParaRPr lang="en-US" sz="1000" dirty="0"/>
           </a:p>
@@ -14638,7 +14638,7 @@
                 <a:ea typeface="Georgia" pitchFamily="34" charset="-122"/>
                 <a:cs typeface="Georgia" pitchFamily="34" charset="-120"/>
               </a:rPr>
-              <a:t>↑ 7</a:t>
+              <a:t>↑ 3</a:t>
             </a:r>
             <a:endParaRPr lang="en-US" sz="2200" dirty="0"/>
           </a:p>
@@ -14677,7 +14677,7 @@
                 <a:ea typeface="Calibri" pitchFamily="34" charset="-122"/>
                 <a:cs typeface="Calibri" pitchFamily="34" charset="-120"/>
               </a:rPr>
-              <a:t>47% of accounts | $22M ARR</a:t>
+              <a:t>30% of accounts | $19.5M ARR</a:t>
             </a:r>
             <a:endParaRPr lang="en-US" sz="800" dirty="0"/>
           </a:p>
@@ -14782,7 +14782,7 @@
                 <a:ea typeface="Georgia" pitchFamily="34" charset="-122"/>
                 <a:cs typeface="Georgia" pitchFamily="34" charset="-120"/>
               </a:rPr>
-              <a:t>→ 5</a:t>
+              <a:t>→ 3</a:t>
             </a:r>
             <a:endParaRPr lang="en-US" sz="2200" dirty="0"/>
           </a:p>
@@ -14821,7 +14821,7 @@
                 <a:ea typeface="Calibri" pitchFamily="34" charset="-122"/>
                 <a:cs typeface="Calibri" pitchFamily="34" charset="-120"/>
               </a:rPr>
-              <a:t>33% of accounts | $16M ARR</a:t>
+              <a:t>30% of accounts | $15.6M ARR</a:t>
             </a:r>
             <a:endParaRPr lang="en-US" sz="800" dirty="0"/>
           </a:p>
@@ -14926,7 +14926,7 @@
                 <a:ea typeface="Georgia" pitchFamily="34" charset="-122"/>
                 <a:cs typeface="Georgia" pitchFamily="34" charset="-120"/>
               </a:rPr>
-              <a:t>↓ 3</a:t>
+              <a:t>↓ 4</a:t>
             </a:r>
             <a:endParaRPr lang="en-US" sz="2200" dirty="0"/>
           </a:p>
@@ -14965,7 +14965,7 @@
                 <a:ea typeface="Calibri" pitchFamily="34" charset="-122"/>
                 <a:cs typeface="Calibri" pitchFamily="34" charset="-120"/>
               </a:rPr>
-              <a:t>20% of accounts | $10M ARR</a:t>
+              <a:t>40% of accounts | $13.4M ARR</a:t>
             </a:r>
             <a:endParaRPr lang="en-US" sz="800" dirty="0"/>
           </a:p>
@@ -15304,7 +15304,7 @@
                 <a:ea typeface="Calibri" pitchFamily="34" charset="-122"/>
                 <a:cs typeface="Calibri" pitchFamily="34" charset="-120"/>
               </a:rPr>
-              <a:t>Summit Data</a:t>
+              <a:t>Orbit Commerce</a:t>
             </a:r>
             <a:endParaRPr lang="en-US" sz="900" dirty="0"/>
           </a:p>
@@ -15343,7 +15343,7 @@
                 <a:ea typeface="Georgia" pitchFamily="34" charset="-122"/>
                 <a:cs typeface="Georgia" pitchFamily="34" charset="-120"/>
               </a:rPr>
-              <a:t>68</a:t>
+              <a:t>85</a:t>
             </a:r>
             <a:endParaRPr lang="en-US" sz="800" dirty="0"/>
           </a:p>
@@ -15382,7 +15382,7 @@
                 <a:ea typeface="Georgia" pitchFamily="34" charset="-122"/>
                 <a:cs typeface="Georgia" pitchFamily="34" charset="-120"/>
               </a:rPr>
-              <a:t>65</a:t>
+              <a:t>82</a:t>
             </a:r>
             <a:endParaRPr lang="en-US" sz="800" dirty="0"/>
           </a:p>
@@ -15421,7 +15421,7 @@
                 <a:ea typeface="Georgia" pitchFamily="34" charset="-122"/>
                 <a:cs typeface="Georgia" pitchFamily="34" charset="-120"/>
               </a:rPr>
-              <a:t>67</a:t>
+              <a:t>85</a:t>
             </a:r>
             <a:endParaRPr lang="en-US" sz="800" dirty="0"/>
           </a:p>
@@ -15460,7 +15460,7 @@
                 <a:ea typeface="Georgia" pitchFamily="34" charset="-122"/>
                 <a:cs typeface="Georgia" pitchFamily="34" charset="-120"/>
               </a:rPr>
-              <a:t>70</a:t>
+              <a:t>85</a:t>
             </a:r>
             <a:endParaRPr lang="en-US" sz="800" dirty="0"/>
           </a:p>
@@ -15499,7 +15499,7 @@
                 <a:ea typeface="Georgia" pitchFamily="34" charset="-122"/>
                 <a:cs typeface="Georgia" pitchFamily="34" charset="-120"/>
               </a:rPr>
-              <a:t>72</a:t>
+              <a:t>83</a:t>
             </a:r>
             <a:endParaRPr lang="en-US" sz="800" dirty="0"/>
           </a:p>
@@ -15538,7 +15538,7 @@
                 <a:ea typeface="Georgia" pitchFamily="34" charset="-122"/>
                 <a:cs typeface="Georgia" pitchFamily="34" charset="-120"/>
               </a:rPr>
-              <a:t>75</a:t>
+              <a:t>83</a:t>
             </a:r>
             <a:endParaRPr lang="en-US" sz="800" dirty="0"/>
           </a:p>
@@ -15577,7 +15577,7 @@
                 <a:ea typeface="Georgia" pitchFamily="34" charset="-122"/>
                 <a:cs typeface="Georgia" pitchFamily="34" charset="-120"/>
               </a:rPr>
-              <a:t>↑ +7</a:t>
+              <a:t>↑ +3</a:t>
             </a:r>
             <a:endParaRPr lang="en-US" sz="900" dirty="0"/>
           </a:p>
@@ -15616,7 +15616,7 @@
                 <a:ea typeface="Calibri" pitchFamily="34" charset="-122"/>
                 <a:cs typeface="Calibri" pitchFamily="34" charset="-120"/>
               </a:rPr>
-              <a:t>Apex Dynamics</a:t>
+              <a:t>Horizon Fintech</a:t>
             </a:r>
             <a:endParaRPr lang="en-US" sz="900" dirty="0"/>
           </a:p>
@@ -15655,7 +15655,7 @@
                 <a:ea typeface="Georgia" pitchFamily="34" charset="-122"/>
                 <a:cs typeface="Georgia" pitchFamily="34" charset="-120"/>
               </a:rPr>
-              <a:t>72</a:t>
+              <a:t>51</a:t>
             </a:r>
             <a:endParaRPr lang="en-US" sz="800" dirty="0"/>
           </a:p>
@@ -15694,7 +15694,7 @@
                 <a:ea typeface="Georgia" pitchFamily="34" charset="-122"/>
                 <a:cs typeface="Georgia" pitchFamily="34" charset="-120"/>
               </a:rPr>
-              <a:t>74</a:t>
+              <a:t>50</a:t>
             </a:r>
             <a:endParaRPr lang="en-US" sz="800" dirty="0"/>
           </a:p>
@@ -15733,7 +15733,7 @@
                 <a:ea typeface="Georgia" pitchFamily="34" charset="-122"/>
                 <a:cs typeface="Georgia" pitchFamily="34" charset="-120"/>
               </a:rPr>
-              <a:t>73</a:t>
+              <a:t>52</a:t>
             </a:r>
             <a:endParaRPr lang="en-US" sz="800" dirty="0"/>
           </a:p>
@@ -15772,7 +15772,7 @@
                 <a:ea typeface="Georgia" pitchFamily="34" charset="-122"/>
                 <a:cs typeface="Georgia" pitchFamily="34" charset="-120"/>
               </a:rPr>
-              <a:t>76</a:t>
+              <a:t>56</a:t>
             </a:r>
             <a:endParaRPr lang="en-US" sz="800" dirty="0"/>
           </a:p>
@@ -15811,7 +15811,7 @@
                 <a:ea typeface="Georgia" pitchFamily="34" charset="-122"/>
                 <a:cs typeface="Georgia" pitchFamily="34" charset="-120"/>
               </a:rPr>
-              <a:t>78</a:t>
+              <a:t>61</a:t>
             </a:r>
             <a:endParaRPr lang="en-US" sz="800" dirty="0"/>
           </a:p>
@@ -15850,7 +15850,7 @@
                 <a:ea typeface="Georgia" pitchFamily="34" charset="-122"/>
                 <a:cs typeface="Georgia" pitchFamily="34" charset="-120"/>
               </a:rPr>
-              <a:t>80</a:t>
+              <a:t>61</a:t>
             </a:r>
             <a:endParaRPr lang="en-US" sz="800" dirty="0"/>
           </a:p>
@@ -15889,7 +15889,7 @@
                 <a:ea typeface="Georgia" pitchFamily="34" charset="-122"/>
                 <a:cs typeface="Georgia" pitchFamily="34" charset="-120"/>
               </a:rPr>
-              <a:t>↑ +8</a:t>
+              <a:t>↑ +10</a:t>
             </a:r>
             <a:endParaRPr lang="en-US" sz="900" dirty="0"/>
           </a:p>
@@ -15928,7 +15928,7 @@
                 <a:ea typeface="Calibri" pitchFamily="34" charset="-122"/>
                 <a:cs typeface="Calibri" pitchFamily="34" charset="-120"/>
               </a:rPr>
-              <a:t>TechGrid Corp</a:t>
+              <a:t>Drift Analytics</a:t>
             </a:r>
             <a:endParaRPr lang="en-US" sz="900" dirty="0"/>
           </a:p>
@@ -15967,7 +15967,7 @@
                 <a:ea typeface="Georgia" pitchFamily="34" charset="-122"/>
                 <a:cs typeface="Georgia" pitchFamily="34" charset="-120"/>
               </a:rPr>
-              <a:t>71</a:t>
+              <a:t>49</a:t>
             </a:r>
             <a:endParaRPr lang="en-US" sz="800" dirty="0"/>
           </a:p>
@@ -16006,7 +16006,7 @@
                 <a:ea typeface="Georgia" pitchFamily="34" charset="-122"/>
                 <a:cs typeface="Georgia" pitchFamily="34" charset="-120"/>
               </a:rPr>
-              <a:t>68</a:t>
+              <a:t>48</a:t>
             </a:r>
             <a:endParaRPr lang="en-US" sz="800" dirty="0"/>
           </a:p>
@@ -16045,7 +16045,7 @@
                 <a:ea typeface="Georgia" pitchFamily="34" charset="-122"/>
                 <a:cs typeface="Georgia" pitchFamily="34" charset="-120"/>
               </a:rPr>
-              <a:t>64</a:t>
+              <a:t>45</a:t>
             </a:r>
             <a:endParaRPr lang="en-US" sz="800" dirty="0"/>
           </a:p>
@@ -16084,7 +16084,7 @@
                 <a:ea typeface="Georgia" pitchFamily="34" charset="-122"/>
                 <a:cs typeface="Georgia" pitchFamily="34" charset="-120"/>
               </a:rPr>
-              <a:t>62</a:t>
+              <a:t>43</a:t>
             </a:r>
             <a:endParaRPr lang="en-US" sz="800" dirty="0"/>
           </a:p>
@@ -16123,7 +16123,7 @@
                 <a:ea typeface="Georgia" pitchFamily="34" charset="-122"/>
                 <a:cs typeface="Georgia" pitchFamily="34" charset="-120"/>
               </a:rPr>
-              <a:t>60</a:t>
+              <a:t>42</a:t>
             </a:r>
             <a:endParaRPr lang="en-US" sz="800" dirty="0"/>
           </a:p>
@@ -16162,7 +16162,7 @@
                 <a:ea typeface="Georgia" pitchFamily="34" charset="-122"/>
                 <a:cs typeface="Georgia" pitchFamily="34" charset="-120"/>
               </a:rPr>
-              <a:t>58</a:t>
+              <a:t>42</a:t>
             </a:r>
             <a:endParaRPr lang="en-US" sz="800" dirty="0"/>
           </a:p>
@@ -16201,7 +16201,7 @@
                 <a:ea typeface="Georgia" pitchFamily="34" charset="-122"/>
                 <a:cs typeface="Georgia" pitchFamily="34" charset="-120"/>
               </a:rPr>
-              <a:t>↓ -13</a:t>
+              <a:t>↓ -7</a:t>
             </a:r>
             <a:endParaRPr lang="en-US" sz="900" dirty="0"/>
           </a:p>
@@ -16240,7 +16240,7 @@
                 <a:ea typeface="Calibri" pitchFamily="34" charset="-122"/>
                 <a:cs typeface="Calibri" pitchFamily="34" charset="-120"/>
               </a:rPr>
-              <a:t>Drift Analytics</a:t>
+              <a:t>Relay Healthcare</a:t>
             </a:r>
             <a:endParaRPr lang="en-US" sz="900" dirty="0"/>
           </a:p>
@@ -16279,7 +16279,7 @@
                 <a:ea typeface="Georgia" pitchFamily="34" charset="-122"/>
                 <a:cs typeface="Georgia" pitchFamily="34" charset="-120"/>
               </a:rPr>
-              <a:t>58</a:t>
+              <a:t>44</a:t>
             </a:r>
             <a:endParaRPr lang="en-US" sz="800" dirty="0"/>
           </a:p>
@@ -16318,7 +16318,7 @@
                 <a:ea typeface="Georgia" pitchFamily="34" charset="-122"/>
                 <a:cs typeface="Georgia" pitchFamily="34" charset="-120"/>
               </a:rPr>
-              <a:t>55</a:t>
+              <a:t>46</a:t>
             </a:r>
             <a:endParaRPr lang="en-US" sz="800" dirty="0"/>
           </a:p>
@@ -16357,7 +16357,7 @@
                 <a:ea typeface="Georgia" pitchFamily="34" charset="-122"/>
                 <a:cs typeface="Georgia" pitchFamily="34" charset="-120"/>
               </a:rPr>
-              <a:t>52</a:t>
+              <a:t>49</a:t>
             </a:r>
             <a:endParaRPr lang="en-US" sz="800" dirty="0"/>
           </a:p>
@@ -16396,7 +16396,7 @@
                 <a:ea typeface="Georgia" pitchFamily="34" charset="-122"/>
                 <a:cs typeface="Georgia" pitchFamily="34" charset="-120"/>
               </a:rPr>
-              <a:t>48</a:t>
+              <a:t>52</a:t>
             </a:r>
             <a:endParaRPr lang="en-US" sz="800" dirty="0"/>
           </a:p>
@@ -16435,7 +16435,7 @@
                 <a:ea typeface="Georgia" pitchFamily="34" charset="-122"/>
                 <a:cs typeface="Georgia" pitchFamily="34" charset="-120"/>
               </a:rPr>
-              <a:t>45</a:t>
+              <a:t>56</a:t>
             </a:r>
             <a:endParaRPr lang="en-US" sz="800" dirty="0"/>
           </a:p>
@@ -16474,7 +16474,7 @@
                 <a:ea typeface="Georgia" pitchFamily="34" charset="-122"/>
                 <a:cs typeface="Georgia" pitchFamily="34" charset="-120"/>
               </a:rPr>
-              <a:t>42</a:t>
+              <a:t>56</a:t>
             </a:r>
             <a:endParaRPr lang="en-US" sz="800" dirty="0"/>
           </a:p>
@@ -16513,7 +16513,7 @@
                 <a:ea typeface="Georgia" pitchFamily="34" charset="-122"/>
                 <a:cs typeface="Georgia" pitchFamily="34" charset="-120"/>
               </a:rPr>
-              <a:t>↓ -16</a:t>
+              <a:t>↑ +12</a:t>
             </a:r>
             <a:endParaRPr lang="en-US" sz="900" dirty="0"/>
           </a:p>
@@ -16552,7 +16552,7 @@
                 <a:ea typeface="Calibri" pitchFamily="34" charset="-122"/>
                 <a:cs typeface="Calibri" pitchFamily="34" charset="-120"/>
               </a:rPr>
-              <a:t>Horizon Labs</a:t>
+              <a:t>Fern Health</a:t>
             </a:r>
             <a:endParaRPr lang="en-US" sz="900" dirty="0"/>
           </a:p>
@@ -16591,7 +16591,7 @@
                 <a:ea typeface="Georgia" pitchFamily="34" charset="-122"/>
                 <a:cs typeface="Georgia" pitchFamily="34" charset="-120"/>
               </a:rPr>
-              <a:t>70</a:t>
+              <a:t>66</a:t>
             </a:r>
             <a:endParaRPr lang="en-US" sz="800" dirty="0"/>
           </a:p>
@@ -16630,7 +16630,7 @@
                 <a:ea typeface="Georgia" pitchFamily="34" charset="-122"/>
                 <a:cs typeface="Georgia" pitchFamily="34" charset="-120"/>
               </a:rPr>
-              <a:t>71</a:t>
+              <a:t>68</a:t>
             </a:r>
             <a:endParaRPr lang="en-US" sz="800" dirty="0"/>
           </a:p>
@@ -16669,7 +16669,7 @@
                 <a:ea typeface="Georgia" pitchFamily="34" charset="-122"/>
                 <a:cs typeface="Georgia" pitchFamily="34" charset="-120"/>
               </a:rPr>
-              <a:t>69</a:t>
+              <a:t>68</a:t>
             </a:r>
             <a:endParaRPr lang="en-US" sz="800" dirty="0"/>
           </a:p>
@@ -16708,7 +16708,7 @@
                 <a:ea typeface="Georgia" pitchFamily="34" charset="-122"/>
                 <a:cs typeface="Georgia" pitchFamily="34" charset="-120"/>
               </a:rPr>
-              <a:t>72</a:t>
+              <a:t>69</a:t>
             </a:r>
             <a:endParaRPr lang="en-US" sz="800" dirty="0"/>
           </a:p>
@@ -16747,7 +16747,7 @@
                 <a:ea typeface="Georgia" pitchFamily="34" charset="-122"/>
                 <a:cs typeface="Georgia" pitchFamily="34" charset="-120"/>
               </a:rPr>
-              <a:t>71</a:t>
+              <a:t>69</a:t>
             </a:r>
             <a:endParaRPr lang="en-US" sz="800" dirty="0"/>
           </a:p>
@@ -16786,7 +16786,7 @@
                 <a:ea typeface="Georgia" pitchFamily="34" charset="-122"/>
                 <a:cs typeface="Georgia" pitchFamily="34" charset="-120"/>
               </a:rPr>
-              <a:t>73</a:t>
+              <a:t>69</a:t>
             </a:r>
             <a:endParaRPr lang="en-US" sz="800" dirty="0"/>
           </a:p>
@@ -16825,7 +16825,7 @@
                 <a:ea typeface="Georgia" pitchFamily="34" charset="-122"/>
                 <a:cs typeface="Georgia" pitchFamily="34" charset="-120"/>
               </a:rPr>
-              <a:t>→ +3</a:t>
+              <a:t>↑ +3</a:t>
             </a:r>
             <a:endParaRPr lang="en-US" sz="900" dirty="0"/>
           </a:p>
@@ -17822,7 +17822,7 @@
                 <a:ea typeface="Calibri" pitchFamily="34" charset="-122"/>
                 <a:cs typeface="Calibri" pitchFamily="34" charset="-120"/>
               </a:rPr>
-              <a:t>Playbook PB-05 triggered</a:t>
+              <a:t>Playbook PB-DC-03 triggered</a:t>
             </a:r>
             <a:endParaRPr lang="en-US" sz="800" dirty="0"/>
           </a:p>
